--- a/Reporte 170726.pptx
+++ b/Reporte 170726.pptx
@@ -6543,10 +6543,10 @@
       </p:sp>
       <p:pic>
         <p:nvPicPr>
-          <p:cNvPr id="4" name="Imagen 3">
+          <p:cNvPr id="5" name="Imagen 4">
             <a:extLst>
               <a:ext uri="{FF2B5EF4-FFF2-40B4-BE49-F238E27FC236}">
-                <a16:creationId xmlns:a16="http://schemas.microsoft.com/office/drawing/2014/main" id="{BC2D511C-FEAB-BF9D-13C0-63D52EF4B749}"/>
+                <a16:creationId xmlns:a16="http://schemas.microsoft.com/office/drawing/2014/main" id="{FC378CD1-D6B2-94AB-4B36-3DECD69B2F48}"/>
               </a:ext>
             </a:extLst>
           </p:cNvPr>
@@ -6563,8 +6563,8 @@
         </p:blipFill>
         <p:spPr>
           <a:xfrm>
-            <a:off x="0" y="887844"/>
-            <a:ext cx="9144000" cy="3510688"/>
+            <a:off x="0" y="897652"/>
+            <a:ext cx="9144000" cy="3491072"/>
           </a:xfrm>
           <a:prstGeom prst="rect">
             <a:avLst/>
@@ -6641,10 +6641,10 @@
       </p:sp>
       <p:pic>
         <p:nvPicPr>
-          <p:cNvPr id="4" name="Imagen 3">
+          <p:cNvPr id="3" name="Imagen 2">
             <a:extLst>
               <a:ext uri="{FF2B5EF4-FFF2-40B4-BE49-F238E27FC236}">
-                <a16:creationId xmlns:a16="http://schemas.microsoft.com/office/drawing/2014/main" id="{4AFC1CD7-9DC7-670A-6A95-36E0625065E2}"/>
+                <a16:creationId xmlns:a16="http://schemas.microsoft.com/office/drawing/2014/main" id="{DE5B5992-7BBD-1D97-69F7-CB3D4258DDC6}"/>
               </a:ext>
             </a:extLst>
           </p:cNvPr>
@@ -6661,8 +6661,8 @@
         </p:blipFill>
         <p:spPr>
           <a:xfrm>
-            <a:off x="-6725" y="1326004"/>
-            <a:ext cx="9144000" cy="2634367"/>
+            <a:off x="0" y="1329685"/>
+            <a:ext cx="9144000" cy="2627005"/>
           </a:xfrm>
           <a:prstGeom prst="rect">
             <a:avLst/>
@@ -6745,10 +6745,10 @@
       </p:sp>
       <p:pic>
         <p:nvPicPr>
-          <p:cNvPr id="4" name="Imagen 3">
+          <p:cNvPr id="3" name="Imagen 2">
             <a:extLst>
               <a:ext uri="{FF2B5EF4-FFF2-40B4-BE49-F238E27FC236}">
-                <a16:creationId xmlns:a16="http://schemas.microsoft.com/office/drawing/2014/main" id="{5B9B9FD7-6285-9EA0-EDB1-D97F23A8472D}"/>
+                <a16:creationId xmlns:a16="http://schemas.microsoft.com/office/drawing/2014/main" id="{B24FE980-3A90-F6BF-BA4E-E0C452F004BD}"/>
               </a:ext>
             </a:extLst>
           </p:cNvPr>
@@ -6765,8 +6765,8 @@
         </p:blipFill>
         <p:spPr>
           <a:xfrm>
-            <a:off x="0" y="999195"/>
-            <a:ext cx="9144000" cy="3287985"/>
+            <a:off x="0" y="971827"/>
+            <a:ext cx="9144000" cy="3342722"/>
           </a:xfrm>
           <a:prstGeom prst="rect">
             <a:avLst/>
@@ -6843,10 +6843,10 @@
       </p:sp>
       <p:pic>
         <p:nvPicPr>
-          <p:cNvPr id="4" name="Imagen 3">
+          <p:cNvPr id="5" name="Imagen 4">
             <a:extLst>
               <a:ext uri="{FF2B5EF4-FFF2-40B4-BE49-F238E27FC236}">
-                <a16:creationId xmlns:a16="http://schemas.microsoft.com/office/drawing/2014/main" id="{80D77439-E368-C13B-3232-56047BE84771}"/>
+                <a16:creationId xmlns:a16="http://schemas.microsoft.com/office/drawing/2014/main" id="{00B1C334-2BF5-C42F-9B18-B16AED1E9212}"/>
               </a:ext>
             </a:extLst>
           </p:cNvPr>
@@ -6863,8 +6863,8 @@
         </p:blipFill>
         <p:spPr>
           <a:xfrm>
-            <a:off x="0" y="1221684"/>
-            <a:ext cx="9144000" cy="2843008"/>
+            <a:off x="0" y="1272854"/>
+            <a:ext cx="9144000" cy="2740667"/>
           </a:xfrm>
           <a:prstGeom prst="rect">
             <a:avLst/>
@@ -6941,10 +6941,10 @@
       </p:sp>
       <p:pic>
         <p:nvPicPr>
-          <p:cNvPr id="4" name="Imagen 3">
+          <p:cNvPr id="3" name="Imagen 2">
             <a:extLst>
               <a:ext uri="{FF2B5EF4-FFF2-40B4-BE49-F238E27FC236}">
-                <a16:creationId xmlns:a16="http://schemas.microsoft.com/office/drawing/2014/main" id="{616DB45F-3E36-367A-995E-ADC164D595F9}"/>
+                <a16:creationId xmlns:a16="http://schemas.microsoft.com/office/drawing/2014/main" id="{6388E8D9-BB36-625F-2676-2D858433BA4D}"/>
               </a:ext>
             </a:extLst>
           </p:cNvPr>
@@ -6961,8 +6961,8 @@
         </p:blipFill>
         <p:spPr>
           <a:xfrm>
-            <a:off x="0" y="732463"/>
-            <a:ext cx="9144000" cy="3821449"/>
+            <a:off x="0" y="629031"/>
+            <a:ext cx="9144000" cy="3885437"/>
           </a:xfrm>
           <a:prstGeom prst="rect">
             <a:avLst/>
@@ -7039,10 +7039,10 @@
       </p:sp>
       <p:pic>
         <p:nvPicPr>
-          <p:cNvPr id="4" name="Imagen 3">
+          <p:cNvPr id="3" name="Imagen 2">
             <a:extLst>
               <a:ext uri="{FF2B5EF4-FFF2-40B4-BE49-F238E27FC236}">
-                <a16:creationId xmlns:a16="http://schemas.microsoft.com/office/drawing/2014/main" id="{FCA64EE3-E937-A910-7996-471F07553C28}"/>
+                <a16:creationId xmlns:a16="http://schemas.microsoft.com/office/drawing/2014/main" id="{4447EA80-5D51-4B28-D796-8D45D21DB340}"/>
               </a:ext>
             </a:extLst>
           </p:cNvPr>
@@ -7059,8 +7059,8 @@
         </p:blipFill>
         <p:spPr>
           <a:xfrm>
-            <a:off x="0" y="1326873"/>
-            <a:ext cx="9144000" cy="2632630"/>
+            <a:off x="0" y="843705"/>
+            <a:ext cx="9144000" cy="3598965"/>
           </a:xfrm>
           <a:prstGeom prst="rect">
             <a:avLst/>
